--- a/presentations/jev-system-one-intro.pptx
+++ b/presentations/jev-system-one-intro.pptx
@@ -6293,7 +6293,7 @@
         <p:spPr>
           <a:xfrm>
             <a:off x="5575300" y="3175000"/>
-            <a:ext cx="2158365" cy="665361"/>
+            <a:ext cx="2158365" cy="878681"/>
           </a:xfrm>
           <a:prstGeom prst="rect">
             <a:avLst/>
@@ -6322,7 +6322,7 @@
                 <a:ea typeface="Arial" pitchFamily="34" charset="-122"/>
                 <a:cs typeface="Arial" pitchFamily="34" charset="-120"/>
               </a:rPr>
-              <a:t>확률 0.15 미만이면 닫기(기록이 설명할 때), 0.75 초과면 조치, 그 사이는 대기열</a:t>
+              <a:t>허가받지 않은 활동일 확률이 0.15 미만이고 기록이 설명하면 닫기, 0.75 초과면 조치, 그 사이는 대기열</a:t>
             </a:r>
             <a:endParaRPr lang="en-US" sz="1200" dirty="0"/>
           </a:p>
@@ -12338,12 +12338,12 @@
         </p:nvSpPr>
         <p:spPr>
           <a:xfrm>
-            <a:off x="815975" y="2556470"/>
-            <a:ext cx="3380284" cy="2012950"/>
+            <a:off x="815975" y="2492970"/>
+            <a:ext cx="3380284" cy="2139950"/>
           </a:xfrm>
           <a:prstGeom prst="roundRect">
             <a:avLst>
-              <a:gd name="adj" fmla="val 4890"/>
+              <a:gd name="adj" fmla="val 4599"/>
             </a:avLst>
           </a:prstGeom>
           <a:solidFill>
@@ -12365,7 +12365,7 @@
         </p:nvSpPr>
         <p:spPr>
           <a:xfrm>
-            <a:off x="1047750" y="2788245"/>
+            <a:off x="1047750" y="2724745"/>
             <a:ext cx="3004236" cy="330200"/>
           </a:xfrm>
           <a:prstGeom prst="rect">
@@ -12409,8 +12409,8 @@
         </p:nvSpPr>
         <p:spPr>
           <a:xfrm>
-            <a:off x="1047750" y="3194645"/>
-            <a:ext cx="3004236" cy="1168400"/>
+            <a:off x="1047750" y="3131145"/>
+            <a:ext cx="3004236" cy="882650"/>
           </a:xfrm>
           <a:prstGeom prst="rect">
             <a:avLst/>
@@ -12439,7 +12439,7 @@
                 <a:ea typeface="Arial" pitchFamily="34" charset="-122"/>
                 <a:cs typeface="Arial" pitchFamily="34" charset="-120"/>
               </a:rPr>
-              <a:t>문장 생성은 하지 않도록 만들어졌습니다. 코딩 에이전트의 모델을 바꿔 끼우는 용도도 아니에요. 추출은 후보를 먼저 뽑고 Jev가 고르게 합니다.</a:t>
+              <a:t>문장은 생성하지 않고, 코딩 에이전트의 모델을 대체하지도 않습니다. 추출은 후보를 먼저 뽑고 Jev가 고릅니다.</a:t>
             </a:r>
             <a:endParaRPr lang="en-US" sz="1500" dirty="0"/>
           </a:p>
@@ -12453,12 +12453,12 @@
         </p:nvSpPr>
         <p:spPr>
           <a:xfrm>
-            <a:off x="4405809" y="2556470"/>
-            <a:ext cx="3380333" cy="2012950"/>
+            <a:off x="4405809" y="2492970"/>
+            <a:ext cx="3380333" cy="2139950"/>
           </a:xfrm>
           <a:prstGeom prst="roundRect">
             <a:avLst>
-              <a:gd name="adj" fmla="val 4890"/>
+              <a:gd name="adj" fmla="val 4599"/>
             </a:avLst>
           </a:prstGeom>
           <a:solidFill>
@@ -12480,7 +12480,7 @@
         </p:nvSpPr>
         <p:spPr>
           <a:xfrm>
-            <a:off x="4637584" y="2788245"/>
+            <a:off x="4637584" y="2724745"/>
             <a:ext cx="3004287" cy="330200"/>
           </a:xfrm>
           <a:prstGeom prst="rect">
@@ -12524,7 +12524,7 @@
         </p:nvSpPr>
         <p:spPr>
           <a:xfrm>
-            <a:off x="4637584" y="3194645"/>
+            <a:off x="4637584" y="3131145"/>
             <a:ext cx="3004287" cy="1168400"/>
           </a:xfrm>
           <a:prstGeom prst="rect">
@@ -12568,12 +12568,12 @@
         </p:nvSpPr>
         <p:spPr>
           <a:xfrm>
-            <a:off x="7995692" y="2556470"/>
-            <a:ext cx="3380333" cy="2012950"/>
+            <a:off x="7995692" y="2492970"/>
+            <a:ext cx="3380333" cy="2139950"/>
           </a:xfrm>
           <a:prstGeom prst="roundRect">
             <a:avLst>
-              <a:gd name="adj" fmla="val 4890"/>
+              <a:gd name="adj" fmla="val 4599"/>
             </a:avLst>
           </a:prstGeom>
           <a:solidFill>
@@ -12595,7 +12595,7 @@
         </p:nvSpPr>
         <p:spPr>
           <a:xfrm>
-            <a:off x="8227467" y="2788245"/>
+            <a:off x="8227467" y="2724745"/>
             <a:ext cx="3004287" cy="330200"/>
           </a:xfrm>
           <a:prstGeom prst="rect">
@@ -12639,7 +12639,7 @@
         </p:nvSpPr>
         <p:spPr>
           <a:xfrm>
-            <a:off x="8227467" y="3194645"/>
+            <a:off x="8227467" y="3131145"/>
             <a:ext cx="3004287" cy="882650"/>
           </a:xfrm>
           <a:prstGeom prst="rect">
